--- a/reports/presentation/MILLING_CEP_SLIDES.pptx
+++ b/reports/presentation/MILLING_CEP_SLIDES.pptx
@@ -6759,8 +6759,8 @@
         </p:nvSpPr>
         <p:spPr>
           <a:xfrm>
-            <a:off x="777240" y="5897880"/>
-            <a:ext cx="10698480" cy="457200"/>
+            <a:off x="777240" y="5742432"/>
+            <a:ext cx="10698480" cy="320040"/>
           </a:xfrm>
           <a:prstGeom prst="rect">
             <a:avLst/>
@@ -6779,7 +6779,46 @@
               </a:lnSpc>
             </a:pPr>
             <a:r>
-              <a:rPr sz="1100" b="0">
+              <a:rPr sz="1050" b="1">
+                <a:solidFill>
+                  <a:srgbClr val="9FC6DE"/>
+                </a:solidFill>
+                <a:latin typeface="Arial"/>
+              </a:rPr>
+              <a:t>Live dashboard:  milling-cep-iguwxgwerngzavkpz2aguj.streamlit.app</a:t>
+            </a:r>
+          </a:p>
+        </p:txBody>
+      </p:sp>
+      <p:sp>
+        <p:nvSpPr>
+          <p:cNvPr id="15" name="TextBox 14"/>
+          <p:cNvSpPr txBox="1"/>
+          <p:nvPr/>
+        </p:nvSpPr>
+        <p:spPr>
+          <a:xfrm>
+            <a:off x="777240" y="6080760"/>
+            <a:ext cx="10698480" cy="320040"/>
+          </a:xfrm>
+          <a:prstGeom prst="rect">
+            <a:avLst/>
+          </a:prstGeom>
+          <a:noFill/>
+        </p:spPr>
+        <p:txBody>
+          <a:bodyPr wrap="square" anchor="t" lIns="0" rIns="0" tIns="0" bIns="0">
+            <a:spAutoFit/>
+          </a:bodyPr>
+          <a:lstStyle/>
+          <a:p>
+            <a:pPr algn="l">
+              <a:lnSpc>
+                <a:spcPct val="100000"/>
+              </a:lnSpc>
+            </a:pPr>
+            <a:r>
+              <a:rPr sz="1050" b="0">
                 <a:solidFill>
                   <a:srgbClr val="B7CBD9"/>
                 </a:solidFill>
